--- a/Causal_Inference_Course/Week10_DifferenceinDifferences_Panel_Methods/Week10_DifferenceinDifferences_Panel_Methods_Lecture.pptx
+++ b/Causal_Inference_Course/Week10_DifferenceinDifferences_Panel_Methods/Week10_DifferenceinDifferences_Panel_Methods_Lecture.pptx
@@ -19919,7 +19919,7 @@
                             <a:srgbClr val="222732"/>
                           </a:solidFill>
                         </a:rPr>
-                        <a:t>+2.8</a:t>
+                        <a:t>+2.7</a:t>
                       </a:r>
                     </a:p>
                   </a:txBody>
